--- a/7 Versionskontrolle Git.pptx
+++ b/7 Versionskontrolle Git.pptx
@@ -154,6 +154,7 @@
 <file path=ppt/revisionInfo.xml><?xml version="1.0" encoding="utf-8"?>
 <p1510:revInfo xmlns:a="http://schemas.openxmlformats.org/drawingml/2006/main" xmlns:r="http://schemas.openxmlformats.org/officeDocument/2006/relationships" xmlns:p1510="http://schemas.microsoft.com/office/powerpoint/2015/10/main">
   <p1510:revLst>
+    <p1510:client id="{27ABB226-9338-4196-9F42-E510CB4390FD}" v="3" dt="2026-04-13T07:07:34.161"/>
     <p1510:client id="{9352C717-5427-4FB8-8B65-AE3534641603}" v="167" dt="2026-04-12T20:24:03.809"/>
   </p1510:revLst>
 </p1510:revInfo>
@@ -164,7 +165,7 @@
   <pc:docChgLst>
     <pc:chgData name="Janna Rück" userId="78f973d6694237d2" providerId="LiveId" clId="{21B08C71-9F94-43D4-BACF-603E19A717CD}"/>
     <pc:docChg chg="undo redo custSel addSld delSld modSld sldOrd">
-      <pc:chgData name="Janna Rück" userId="78f973d6694237d2" providerId="LiveId" clId="{21B08C71-9F94-43D4-BACF-603E19A717CD}" dt="2026-04-13T06:17:55.229" v="9740" actId="478"/>
+      <pc:chgData name="Janna Rück" userId="78f973d6694237d2" providerId="LiveId" clId="{21B08C71-9F94-43D4-BACF-603E19A717CD}" dt="2026-04-13T07:07:34.161" v="9774"/>
       <pc:docMkLst>
         <pc:docMk/>
       </pc:docMkLst>
@@ -773,7 +774,7 @@
         </pc:spChg>
       </pc:sldChg>
       <pc:sldChg chg="addSp modSp new mod ord">
-        <pc:chgData name="Janna Rück" userId="78f973d6694237d2" providerId="LiveId" clId="{21B08C71-9F94-43D4-BACF-603E19A717CD}" dt="2026-04-12T19:29:41.080" v="8402" actId="20577"/>
+        <pc:chgData name="Janna Rück" userId="78f973d6694237d2" providerId="LiveId" clId="{21B08C71-9F94-43D4-BACF-603E19A717CD}" dt="2026-04-13T07:01:18.373" v="9758" actId="20577"/>
         <pc:sldMkLst>
           <pc:docMk/>
           <pc:sldMk cId="152826355" sldId="283"/>
@@ -787,7 +788,7 @@
           </ac:spMkLst>
         </pc:spChg>
         <pc:spChg chg="mod">
-          <ac:chgData name="Janna Rück" userId="78f973d6694237d2" providerId="LiveId" clId="{21B08C71-9F94-43D4-BACF-603E19A717CD}" dt="2026-04-12T19:29:41.080" v="8402" actId="20577"/>
+          <ac:chgData name="Janna Rück" userId="78f973d6694237d2" providerId="LiveId" clId="{21B08C71-9F94-43D4-BACF-603E19A717CD}" dt="2026-04-13T07:01:18.373" v="9758" actId="20577"/>
           <ac:spMkLst>
             <pc:docMk/>
             <pc:sldMk cId="152826355" sldId="283"/>
@@ -1182,7 +1183,7 @@
         </pc:spChg>
       </pc:sldChg>
       <pc:sldChg chg="modSp new mod">
-        <pc:chgData name="Janna Rück" userId="78f973d6694237d2" providerId="LiveId" clId="{21B08C71-9F94-43D4-BACF-603E19A717CD}" dt="2026-04-09T20:47:46.436" v="7619" actId="20577"/>
+        <pc:chgData name="Janna Rück" userId="78f973d6694237d2" providerId="LiveId" clId="{21B08C71-9F94-43D4-BACF-603E19A717CD}" dt="2026-04-13T07:07:34.161" v="9774"/>
         <pc:sldMkLst>
           <pc:docMk/>
           <pc:sldMk cId="1344648534" sldId="290"/>
@@ -1196,7 +1197,7 @@
           </ac:spMkLst>
         </pc:spChg>
         <pc:spChg chg="mod">
-          <ac:chgData name="Janna Rück" userId="78f973d6694237d2" providerId="LiveId" clId="{21B08C71-9F94-43D4-BACF-603E19A717CD}" dt="2026-04-09T20:47:46.436" v="7619" actId="20577"/>
+          <ac:chgData name="Janna Rück" userId="78f973d6694237d2" providerId="LiveId" clId="{21B08C71-9F94-43D4-BACF-603E19A717CD}" dt="2026-04-13T07:07:34.161" v="9774"/>
           <ac:spMkLst>
             <pc:docMk/>
             <pc:sldMk cId="1344648534" sldId="290"/>
@@ -8670,7 +8671,7 @@
           <a:p>
             <a:r>
               <a:rPr lang="de-DE" dirty="0"/>
-              <a:t>lädt Änderungen (was im lokalen Repo ist, aber noch nicht im Online-Repo) ins Online-Repository (falls vorhanden) hoch, sodass andere die Änderungen herunterladen können</a:t>
+              <a:t>lädt Änderungen (was im lokalen Repo ist, aber noch nicht im Online-Repo) ins Online-Repository hoch, sodass andere die Änderungen herunterladen können</a:t>
             </a:r>
           </a:p>
           <a:p>
@@ -9617,13 +9618,24 @@
             </a:r>
             <a:r>
               <a:rPr lang="de-DE" dirty="0"/>
-              <a:t> neuer-</a:t>
+              <a:t> &lt;</a:t>
             </a:r>
             <a:r>
               <a:rPr lang="de-DE" dirty="0" err="1"/>
               <a:t>branch</a:t>
             </a:r>
-            <a:endParaRPr lang="de-DE" dirty="0"/>
+            <a:r>
+              <a:rPr lang="de-DE" dirty="0"/>
+              <a:t> </a:t>
+            </a:r>
+            <a:r>
+              <a:rPr lang="de-DE" dirty="0" err="1"/>
+              <a:t>name</a:t>
+            </a:r>
+            <a:r>
+              <a:rPr lang="de-DE" dirty="0"/>
+              <a:t>&gt;</a:t>
+            </a:r>
           </a:p>
           <a:p>
             <a:pPr marL="0" indent="0">
@@ -9641,9 +9653,6 @@
             </a:r>
           </a:p>
           <a:p>
-            <a:pPr marL="0" indent="0">
-              <a:buNone/>
-            </a:pPr>
             <a:r>
               <a:rPr lang="de-DE" dirty="0" err="1"/>
               <a:t>git</a:t>
@@ -9658,13 +9667,24 @@
             </a:r>
             <a:r>
               <a:rPr lang="de-DE" dirty="0"/>
-              <a:t> neuer-</a:t>
+              <a:t> &lt;</a:t>
             </a:r>
             <a:r>
               <a:rPr lang="de-DE" dirty="0" err="1"/>
               <a:t>branch</a:t>
             </a:r>
-            <a:endParaRPr lang="de-DE" dirty="0"/>
+            <a:r>
+              <a:rPr lang="de-DE" dirty="0"/>
+              <a:t> </a:t>
+            </a:r>
+            <a:r>
+              <a:rPr lang="de-DE" dirty="0" err="1"/>
+              <a:t>name</a:t>
+            </a:r>
+            <a:r>
+              <a:rPr lang="de-DE" dirty="0"/>
+              <a:t>&gt;</a:t>
+            </a:r>
           </a:p>
           <a:p>
             <a:r>
@@ -9673,22 +9693,30 @@
             </a:r>
           </a:p>
           <a:p>
-            <a:pPr marL="0" indent="0">
-              <a:buNone/>
-            </a:pPr>
             <a:r>
               <a:rPr lang="de-DE" dirty="0" err="1"/>
               <a:t>git</a:t>
             </a:r>
             <a:r>
               <a:rPr lang="de-DE" dirty="0"/>
-              <a:t> switch neuer-</a:t>
+              <a:t> switch &lt;</a:t>
             </a:r>
             <a:r>
               <a:rPr lang="de-DE" dirty="0" err="1"/>
               <a:t>branch</a:t>
             </a:r>
-            <a:endParaRPr lang="de-DE" dirty="0"/>
+            <a:r>
+              <a:rPr lang="de-DE" dirty="0"/>
+              <a:t> </a:t>
+            </a:r>
+            <a:r>
+              <a:rPr lang="de-DE" dirty="0" err="1"/>
+              <a:t>name</a:t>
+            </a:r>
+            <a:r>
+              <a:rPr lang="de-DE" dirty="0"/>
+              <a:t>&gt;</a:t>
+            </a:r>
           </a:p>
           <a:p>
             <a:pPr marL="0" indent="0">
@@ -9709,9 +9737,6 @@
             </a:r>
           </a:p>
           <a:p>
-            <a:pPr marL="0" indent="0">
-              <a:buNone/>
-            </a:pPr>
             <a:r>
               <a:rPr lang="de-DE" dirty="0" err="1"/>
               <a:t>git</a:t>
@@ -9726,13 +9751,24 @@
             </a:r>
             <a:r>
               <a:rPr lang="de-DE" dirty="0"/>
-              <a:t> -b neuer-</a:t>
+              <a:t> -b &lt;</a:t>
             </a:r>
             <a:r>
               <a:rPr lang="de-DE" dirty="0" err="1"/>
               <a:t>branch</a:t>
             </a:r>
-            <a:endParaRPr lang="de-DE" dirty="0"/>
+            <a:r>
+              <a:rPr lang="de-DE" dirty="0"/>
+              <a:t> </a:t>
+            </a:r>
+            <a:r>
+              <a:rPr lang="de-DE" dirty="0" err="1"/>
+              <a:t>name</a:t>
+            </a:r>
+            <a:r>
+              <a:rPr lang="de-DE" dirty="0"/>
+              <a:t>&gt;</a:t>
+            </a:r>
           </a:p>
           <a:p>
             <a:pPr marL="0" indent="0">
